--- a/主是我力量.pptx
+++ b/主是我力量.pptx
@@ -168,7 +168,7 @@
           <a:lstStyle/>
           <a:p>
             <a:r>
-              <a:rPr lang="en-US" altLang="zh-TW" smtClean="0"/>
+              <a:rPr lang="en-US" altLang="zh-TW"/>
               <a:t>Click to edit Master title style</a:t>
             </a:r>
             <a:endParaRPr lang="zh-TW" altLang="en-US"/>
@@ -287,7 +287,7 @@
           </a:lstStyle>
           <a:p>
             <a:r>
-              <a:rPr lang="en-US" altLang="zh-TW" smtClean="0"/>
+              <a:rPr lang="en-US" altLang="zh-TW"/>
               <a:t>Click to edit Master subtitle style</a:t>
             </a:r>
             <a:endParaRPr lang="zh-TW" altLang="en-US"/>
@@ -311,7 +311,7 @@
           <a:p>
             <a:fld id="{DB37BC26-CD71-4144-9EA3-A3A0297D4D7C}" type="datetimeFigureOut">
               <a:rPr lang="zh-TW" altLang="en-US" smtClean="0"/>
-              <a:t>2021/6/3</a:t>
+              <a:t>2024/11/23</a:t>
             </a:fld>
             <a:endParaRPr lang="zh-TW" altLang="en-US"/>
           </a:p>
@@ -405,7 +405,7 @@
           <a:lstStyle/>
           <a:p>
             <a:r>
-              <a:rPr lang="en-US" altLang="zh-TW" smtClean="0"/>
+              <a:rPr lang="en-US" altLang="zh-TW"/>
               <a:t>Click to edit Master title style</a:t>
             </a:r>
             <a:endParaRPr lang="zh-TW" altLang="en-US"/>
@@ -429,35 +429,35 @@
           <a:p>
             <a:pPr lvl="0"/>
             <a:r>
-              <a:rPr lang="en-US" altLang="zh-TW" smtClean="0"/>
+              <a:rPr lang="en-US" altLang="zh-TW"/>
               <a:t>Edit Master text styles</a:t>
             </a:r>
           </a:p>
           <a:p>
             <a:pPr lvl="1"/>
             <a:r>
-              <a:rPr lang="en-US" altLang="zh-TW" smtClean="0"/>
+              <a:rPr lang="en-US" altLang="zh-TW"/>
               <a:t>Second level</a:t>
             </a:r>
           </a:p>
           <a:p>
             <a:pPr lvl="2"/>
             <a:r>
-              <a:rPr lang="en-US" altLang="zh-TW" smtClean="0"/>
+              <a:rPr lang="en-US" altLang="zh-TW"/>
               <a:t>Third level</a:t>
             </a:r>
           </a:p>
           <a:p>
             <a:pPr lvl="3"/>
             <a:r>
-              <a:rPr lang="en-US" altLang="zh-TW" smtClean="0"/>
+              <a:rPr lang="en-US" altLang="zh-TW"/>
               <a:t>Fourth level</a:t>
             </a:r>
           </a:p>
           <a:p>
             <a:pPr lvl="4"/>
             <a:r>
-              <a:rPr lang="en-US" altLang="zh-TW" smtClean="0"/>
+              <a:rPr lang="en-US" altLang="zh-TW"/>
               <a:t>Fifth level</a:t>
             </a:r>
             <a:endParaRPr lang="zh-TW" altLang="en-US"/>
@@ -481,7 +481,7 @@
           <a:p>
             <a:fld id="{DB37BC26-CD71-4144-9EA3-A3A0297D4D7C}" type="datetimeFigureOut">
               <a:rPr lang="zh-TW" altLang="en-US" smtClean="0"/>
-              <a:t>2021/6/3</a:t>
+              <a:t>2024/11/23</a:t>
             </a:fld>
             <a:endParaRPr lang="zh-TW" altLang="en-US"/>
           </a:p>
@@ -580,7 +580,7 @@
           <a:lstStyle/>
           <a:p>
             <a:r>
-              <a:rPr lang="en-US" altLang="zh-TW" smtClean="0"/>
+              <a:rPr lang="en-US" altLang="zh-TW"/>
               <a:t>Click to edit Master title style</a:t>
             </a:r>
             <a:endParaRPr lang="zh-TW" altLang="en-US"/>
@@ -609,35 +609,35 @@
           <a:p>
             <a:pPr lvl="0"/>
             <a:r>
-              <a:rPr lang="en-US" altLang="zh-TW" smtClean="0"/>
+              <a:rPr lang="en-US" altLang="zh-TW"/>
               <a:t>Edit Master text styles</a:t>
             </a:r>
           </a:p>
           <a:p>
             <a:pPr lvl="1"/>
             <a:r>
-              <a:rPr lang="en-US" altLang="zh-TW" smtClean="0"/>
+              <a:rPr lang="en-US" altLang="zh-TW"/>
               <a:t>Second level</a:t>
             </a:r>
           </a:p>
           <a:p>
             <a:pPr lvl="2"/>
             <a:r>
-              <a:rPr lang="en-US" altLang="zh-TW" smtClean="0"/>
+              <a:rPr lang="en-US" altLang="zh-TW"/>
               <a:t>Third level</a:t>
             </a:r>
           </a:p>
           <a:p>
             <a:pPr lvl="3"/>
             <a:r>
-              <a:rPr lang="en-US" altLang="zh-TW" smtClean="0"/>
+              <a:rPr lang="en-US" altLang="zh-TW"/>
               <a:t>Fourth level</a:t>
             </a:r>
           </a:p>
           <a:p>
             <a:pPr lvl="4"/>
             <a:r>
-              <a:rPr lang="en-US" altLang="zh-TW" smtClean="0"/>
+              <a:rPr lang="en-US" altLang="zh-TW"/>
               <a:t>Fifth level</a:t>
             </a:r>
             <a:endParaRPr lang="zh-TW" altLang="en-US"/>
@@ -661,7 +661,7 @@
           <a:p>
             <a:fld id="{DB37BC26-CD71-4144-9EA3-A3A0297D4D7C}" type="datetimeFigureOut">
               <a:rPr lang="zh-TW" altLang="en-US" smtClean="0"/>
-              <a:t>2021/6/3</a:t>
+              <a:t>2024/11/23</a:t>
             </a:fld>
             <a:endParaRPr lang="zh-TW" altLang="en-US"/>
           </a:p>
@@ -755,7 +755,7 @@
           <a:lstStyle/>
           <a:p>
             <a:r>
-              <a:rPr lang="en-US" altLang="zh-TW" smtClean="0"/>
+              <a:rPr lang="en-US" altLang="zh-TW"/>
               <a:t>Click to edit Master title style</a:t>
             </a:r>
             <a:endParaRPr lang="zh-TW" altLang="en-US"/>
@@ -779,35 +779,35 @@
           <a:p>
             <a:pPr lvl="0"/>
             <a:r>
-              <a:rPr lang="en-US" altLang="zh-TW" smtClean="0"/>
+              <a:rPr lang="en-US" altLang="zh-TW"/>
               <a:t>Edit Master text styles</a:t>
             </a:r>
           </a:p>
           <a:p>
             <a:pPr lvl="1"/>
             <a:r>
-              <a:rPr lang="en-US" altLang="zh-TW" smtClean="0"/>
+              <a:rPr lang="en-US" altLang="zh-TW"/>
               <a:t>Second level</a:t>
             </a:r>
           </a:p>
           <a:p>
             <a:pPr lvl="2"/>
             <a:r>
-              <a:rPr lang="en-US" altLang="zh-TW" smtClean="0"/>
+              <a:rPr lang="en-US" altLang="zh-TW"/>
               <a:t>Third level</a:t>
             </a:r>
           </a:p>
           <a:p>
             <a:pPr lvl="3"/>
             <a:r>
-              <a:rPr lang="en-US" altLang="zh-TW" smtClean="0"/>
+              <a:rPr lang="en-US" altLang="zh-TW"/>
               <a:t>Fourth level</a:t>
             </a:r>
           </a:p>
           <a:p>
             <a:pPr lvl="4"/>
             <a:r>
-              <a:rPr lang="en-US" altLang="zh-TW" smtClean="0"/>
+              <a:rPr lang="en-US" altLang="zh-TW"/>
               <a:t>Fifth level</a:t>
             </a:r>
             <a:endParaRPr lang="zh-TW" altLang="en-US"/>
@@ -831,7 +831,7 @@
           <a:p>
             <a:fld id="{DB37BC26-CD71-4144-9EA3-A3A0297D4D7C}" type="datetimeFigureOut">
               <a:rPr lang="zh-TW" altLang="en-US" smtClean="0"/>
-              <a:t>2021/6/3</a:t>
+              <a:t>2024/11/23</a:t>
             </a:fld>
             <a:endParaRPr lang="zh-TW" altLang="en-US"/>
           </a:p>
@@ -934,7 +934,7 @@
           </a:lstStyle>
           <a:p>
             <a:r>
-              <a:rPr lang="en-US" altLang="zh-TW" smtClean="0"/>
+              <a:rPr lang="en-US" altLang="zh-TW"/>
               <a:t>Click to edit Master title style</a:t>
             </a:r>
             <a:endParaRPr lang="zh-TW" altLang="en-US"/>
@@ -1054,7 +1054,7 @@
           <a:p>
             <a:pPr lvl="0"/>
             <a:r>
-              <a:rPr lang="en-US" altLang="zh-TW" smtClean="0"/>
+              <a:rPr lang="en-US" altLang="zh-TW"/>
               <a:t>Edit Master text styles</a:t>
             </a:r>
           </a:p>
@@ -1077,7 +1077,7 @@
           <a:p>
             <a:fld id="{DB37BC26-CD71-4144-9EA3-A3A0297D4D7C}" type="datetimeFigureOut">
               <a:rPr lang="zh-TW" altLang="en-US" smtClean="0"/>
-              <a:t>2021/6/3</a:t>
+              <a:t>2024/11/23</a:t>
             </a:fld>
             <a:endParaRPr lang="zh-TW" altLang="en-US"/>
           </a:p>
@@ -1171,7 +1171,7 @@
           <a:lstStyle/>
           <a:p>
             <a:r>
-              <a:rPr lang="en-US" altLang="zh-TW" smtClean="0"/>
+              <a:rPr lang="en-US" altLang="zh-TW"/>
               <a:t>Click to edit Master title style</a:t>
             </a:r>
             <a:endParaRPr lang="zh-TW" altLang="en-US"/>
@@ -1228,35 +1228,35 @@
           <a:p>
             <a:pPr lvl="0"/>
             <a:r>
-              <a:rPr lang="en-US" altLang="zh-TW" smtClean="0"/>
+              <a:rPr lang="en-US" altLang="zh-TW"/>
               <a:t>Edit Master text styles</a:t>
             </a:r>
           </a:p>
           <a:p>
             <a:pPr lvl="1"/>
             <a:r>
-              <a:rPr lang="en-US" altLang="zh-TW" smtClean="0"/>
+              <a:rPr lang="en-US" altLang="zh-TW"/>
               <a:t>Second level</a:t>
             </a:r>
           </a:p>
           <a:p>
             <a:pPr lvl="2"/>
             <a:r>
-              <a:rPr lang="en-US" altLang="zh-TW" smtClean="0"/>
+              <a:rPr lang="en-US" altLang="zh-TW"/>
               <a:t>Third level</a:t>
             </a:r>
           </a:p>
           <a:p>
             <a:pPr lvl="3"/>
             <a:r>
-              <a:rPr lang="en-US" altLang="zh-TW" smtClean="0"/>
+              <a:rPr lang="en-US" altLang="zh-TW"/>
               <a:t>Fourth level</a:t>
             </a:r>
           </a:p>
           <a:p>
             <a:pPr lvl="4"/>
             <a:r>
-              <a:rPr lang="en-US" altLang="zh-TW" smtClean="0"/>
+              <a:rPr lang="en-US" altLang="zh-TW"/>
               <a:t>Fifth level</a:t>
             </a:r>
             <a:endParaRPr lang="zh-TW" altLang="en-US"/>
@@ -1313,35 +1313,35 @@
           <a:p>
             <a:pPr lvl="0"/>
             <a:r>
-              <a:rPr lang="en-US" altLang="zh-TW" smtClean="0"/>
+              <a:rPr lang="en-US" altLang="zh-TW"/>
               <a:t>Edit Master text styles</a:t>
             </a:r>
           </a:p>
           <a:p>
             <a:pPr lvl="1"/>
             <a:r>
-              <a:rPr lang="en-US" altLang="zh-TW" smtClean="0"/>
+              <a:rPr lang="en-US" altLang="zh-TW"/>
               <a:t>Second level</a:t>
             </a:r>
           </a:p>
           <a:p>
             <a:pPr lvl="2"/>
             <a:r>
-              <a:rPr lang="en-US" altLang="zh-TW" smtClean="0"/>
+              <a:rPr lang="en-US" altLang="zh-TW"/>
               <a:t>Third level</a:t>
             </a:r>
           </a:p>
           <a:p>
             <a:pPr lvl="3"/>
             <a:r>
-              <a:rPr lang="en-US" altLang="zh-TW" smtClean="0"/>
+              <a:rPr lang="en-US" altLang="zh-TW"/>
               <a:t>Fourth level</a:t>
             </a:r>
           </a:p>
           <a:p>
             <a:pPr lvl="4"/>
             <a:r>
-              <a:rPr lang="en-US" altLang="zh-TW" smtClean="0"/>
+              <a:rPr lang="en-US" altLang="zh-TW"/>
               <a:t>Fifth level</a:t>
             </a:r>
             <a:endParaRPr lang="zh-TW" altLang="en-US"/>
@@ -1365,7 +1365,7 @@
           <a:p>
             <a:fld id="{DB37BC26-CD71-4144-9EA3-A3A0297D4D7C}" type="datetimeFigureOut">
               <a:rPr lang="zh-TW" altLang="en-US" smtClean="0"/>
-              <a:t>2021/6/3</a:t>
+              <a:t>2024/11/23</a:t>
             </a:fld>
             <a:endParaRPr lang="zh-TW" altLang="en-US"/>
           </a:p>
@@ -1463,7 +1463,7 @@
           </a:lstStyle>
           <a:p>
             <a:r>
-              <a:rPr lang="en-US" altLang="zh-TW" smtClean="0"/>
+              <a:rPr lang="en-US" altLang="zh-TW"/>
               <a:t>Click to edit Master title style</a:t>
             </a:r>
             <a:endParaRPr lang="zh-TW" altLang="en-US"/>
@@ -1529,7 +1529,7 @@
           <a:p>
             <a:pPr lvl="0"/>
             <a:r>
-              <a:rPr lang="en-US" altLang="zh-TW" smtClean="0"/>
+              <a:rPr lang="en-US" altLang="zh-TW"/>
               <a:t>Edit Master text styles</a:t>
             </a:r>
           </a:p>
@@ -1585,35 +1585,35 @@
           <a:p>
             <a:pPr lvl="0"/>
             <a:r>
-              <a:rPr lang="en-US" altLang="zh-TW" smtClean="0"/>
+              <a:rPr lang="en-US" altLang="zh-TW"/>
               <a:t>Edit Master text styles</a:t>
             </a:r>
           </a:p>
           <a:p>
             <a:pPr lvl="1"/>
             <a:r>
-              <a:rPr lang="en-US" altLang="zh-TW" smtClean="0"/>
+              <a:rPr lang="en-US" altLang="zh-TW"/>
               <a:t>Second level</a:t>
             </a:r>
           </a:p>
           <a:p>
             <a:pPr lvl="2"/>
             <a:r>
-              <a:rPr lang="en-US" altLang="zh-TW" smtClean="0"/>
+              <a:rPr lang="en-US" altLang="zh-TW"/>
               <a:t>Third level</a:t>
             </a:r>
           </a:p>
           <a:p>
             <a:pPr lvl="3"/>
             <a:r>
-              <a:rPr lang="en-US" altLang="zh-TW" smtClean="0"/>
+              <a:rPr lang="en-US" altLang="zh-TW"/>
               <a:t>Fourth level</a:t>
             </a:r>
           </a:p>
           <a:p>
             <a:pPr lvl="4"/>
             <a:r>
-              <a:rPr lang="en-US" altLang="zh-TW" smtClean="0"/>
+              <a:rPr lang="en-US" altLang="zh-TW"/>
               <a:t>Fifth level</a:t>
             </a:r>
             <a:endParaRPr lang="zh-TW" altLang="en-US"/>
@@ -1679,7 +1679,7 @@
           <a:p>
             <a:pPr lvl="0"/>
             <a:r>
-              <a:rPr lang="en-US" altLang="zh-TW" smtClean="0"/>
+              <a:rPr lang="en-US" altLang="zh-TW"/>
               <a:t>Edit Master text styles</a:t>
             </a:r>
           </a:p>
@@ -1735,35 +1735,35 @@
           <a:p>
             <a:pPr lvl="0"/>
             <a:r>
-              <a:rPr lang="en-US" altLang="zh-TW" smtClean="0"/>
+              <a:rPr lang="en-US" altLang="zh-TW"/>
               <a:t>Edit Master text styles</a:t>
             </a:r>
           </a:p>
           <a:p>
             <a:pPr lvl="1"/>
             <a:r>
-              <a:rPr lang="en-US" altLang="zh-TW" smtClean="0"/>
+              <a:rPr lang="en-US" altLang="zh-TW"/>
               <a:t>Second level</a:t>
             </a:r>
           </a:p>
           <a:p>
             <a:pPr lvl="2"/>
             <a:r>
-              <a:rPr lang="en-US" altLang="zh-TW" smtClean="0"/>
+              <a:rPr lang="en-US" altLang="zh-TW"/>
               <a:t>Third level</a:t>
             </a:r>
           </a:p>
           <a:p>
             <a:pPr lvl="3"/>
             <a:r>
-              <a:rPr lang="en-US" altLang="zh-TW" smtClean="0"/>
+              <a:rPr lang="en-US" altLang="zh-TW"/>
               <a:t>Fourth level</a:t>
             </a:r>
           </a:p>
           <a:p>
             <a:pPr lvl="4"/>
             <a:r>
-              <a:rPr lang="en-US" altLang="zh-TW" smtClean="0"/>
+              <a:rPr lang="en-US" altLang="zh-TW"/>
               <a:t>Fifth level</a:t>
             </a:r>
             <a:endParaRPr lang="zh-TW" altLang="en-US"/>
@@ -1787,7 +1787,7 @@
           <a:p>
             <a:fld id="{DB37BC26-CD71-4144-9EA3-A3A0297D4D7C}" type="datetimeFigureOut">
               <a:rPr lang="zh-TW" altLang="en-US" smtClean="0"/>
-              <a:t>2021/6/3</a:t>
+              <a:t>2024/11/23</a:t>
             </a:fld>
             <a:endParaRPr lang="zh-TW" altLang="en-US"/>
           </a:p>
@@ -1881,7 +1881,7 @@
           <a:lstStyle/>
           <a:p>
             <a:r>
-              <a:rPr lang="en-US" altLang="zh-TW" smtClean="0"/>
+              <a:rPr lang="en-US" altLang="zh-TW"/>
               <a:t>Click to edit Master title style</a:t>
             </a:r>
             <a:endParaRPr lang="zh-TW" altLang="en-US"/>
@@ -1905,7 +1905,7 @@
           <a:p>
             <a:fld id="{DB37BC26-CD71-4144-9EA3-A3A0297D4D7C}" type="datetimeFigureOut">
               <a:rPr lang="zh-TW" altLang="en-US" smtClean="0"/>
-              <a:t>2021/6/3</a:t>
+              <a:t>2024/11/23</a:t>
             </a:fld>
             <a:endParaRPr lang="zh-TW" altLang="en-US"/>
           </a:p>
@@ -2000,7 +2000,7 @@
           <a:p>
             <a:fld id="{DB37BC26-CD71-4144-9EA3-A3A0297D4D7C}" type="datetimeFigureOut">
               <a:rPr lang="zh-TW" altLang="en-US" smtClean="0"/>
-              <a:t>2021/6/3</a:t>
+              <a:t>2024/11/23</a:t>
             </a:fld>
             <a:endParaRPr lang="zh-TW" altLang="en-US"/>
           </a:p>
@@ -2103,7 +2103,7 @@
           </a:lstStyle>
           <a:p>
             <a:r>
-              <a:rPr lang="en-US" altLang="zh-TW" smtClean="0"/>
+              <a:rPr lang="en-US" altLang="zh-TW"/>
               <a:t>Click to edit Master title style</a:t>
             </a:r>
             <a:endParaRPr lang="zh-TW" altLang="en-US"/>
@@ -2160,35 +2160,35 @@
           <a:p>
             <a:pPr lvl="0"/>
             <a:r>
-              <a:rPr lang="en-US" altLang="zh-TW" smtClean="0"/>
+              <a:rPr lang="en-US" altLang="zh-TW"/>
               <a:t>Edit Master text styles</a:t>
             </a:r>
           </a:p>
           <a:p>
             <a:pPr lvl="1"/>
             <a:r>
-              <a:rPr lang="en-US" altLang="zh-TW" smtClean="0"/>
+              <a:rPr lang="en-US" altLang="zh-TW"/>
               <a:t>Second level</a:t>
             </a:r>
           </a:p>
           <a:p>
             <a:pPr lvl="2"/>
             <a:r>
-              <a:rPr lang="en-US" altLang="zh-TW" smtClean="0"/>
+              <a:rPr lang="en-US" altLang="zh-TW"/>
               <a:t>Third level</a:t>
             </a:r>
           </a:p>
           <a:p>
             <a:pPr lvl="3"/>
             <a:r>
-              <a:rPr lang="en-US" altLang="zh-TW" smtClean="0"/>
+              <a:rPr lang="en-US" altLang="zh-TW"/>
               <a:t>Fourth level</a:t>
             </a:r>
           </a:p>
           <a:p>
             <a:pPr lvl="4"/>
             <a:r>
-              <a:rPr lang="en-US" altLang="zh-TW" smtClean="0"/>
+              <a:rPr lang="en-US" altLang="zh-TW"/>
               <a:t>Fifth level</a:t>
             </a:r>
             <a:endParaRPr lang="zh-TW" altLang="en-US"/>
@@ -2254,7 +2254,7 @@
           <a:p>
             <a:pPr lvl="0"/>
             <a:r>
-              <a:rPr lang="en-US" altLang="zh-TW" smtClean="0"/>
+              <a:rPr lang="en-US" altLang="zh-TW"/>
               <a:t>Edit Master text styles</a:t>
             </a:r>
           </a:p>
@@ -2277,7 +2277,7 @@
           <a:p>
             <a:fld id="{DB37BC26-CD71-4144-9EA3-A3A0297D4D7C}" type="datetimeFigureOut">
               <a:rPr lang="zh-TW" altLang="en-US" smtClean="0"/>
-              <a:t>2021/6/3</a:t>
+              <a:t>2024/11/23</a:t>
             </a:fld>
             <a:endParaRPr lang="zh-TW" altLang="en-US"/>
           </a:p>
@@ -2380,7 +2380,7 @@
           </a:lstStyle>
           <a:p>
             <a:r>
-              <a:rPr lang="en-US" altLang="zh-TW" smtClean="0"/>
+              <a:rPr lang="en-US" altLang="zh-TW"/>
               <a:t>Click to edit Master title style</a:t>
             </a:r>
             <a:endParaRPr lang="zh-TW" altLang="en-US"/>
@@ -2445,7 +2445,7 @@
           </a:lstStyle>
           <a:p>
             <a:r>
-              <a:rPr lang="en-US" altLang="zh-TW" smtClean="0"/>
+              <a:rPr lang="en-US" altLang="zh-TW"/>
               <a:t>Click icon to add picture</a:t>
             </a:r>
             <a:endParaRPr lang="zh-TW" altLang="en-US"/>
@@ -2511,7 +2511,7 @@
           <a:p>
             <a:pPr lvl="0"/>
             <a:r>
-              <a:rPr lang="en-US" altLang="zh-TW" smtClean="0"/>
+              <a:rPr lang="en-US" altLang="zh-TW"/>
               <a:t>Edit Master text styles</a:t>
             </a:r>
           </a:p>
@@ -2534,7 +2534,7 @@
           <a:p>
             <a:fld id="{DB37BC26-CD71-4144-9EA3-A3A0297D4D7C}" type="datetimeFigureOut">
               <a:rPr lang="zh-TW" altLang="en-US" smtClean="0"/>
-              <a:t>2021/6/3</a:t>
+              <a:t>2024/11/23</a:t>
             </a:fld>
             <a:endParaRPr lang="zh-TW" altLang="en-US"/>
           </a:p>
@@ -2648,10 +2648,9 @@
           <a:lstStyle/>
           <a:p>
             <a:r>
-              <a:rPr lang="zh-TW" altLang="en-US" smtClean="0"/>
+              <a:rPr lang="zh-TW" altLang="en-US"/>
               <a:t>按一下以編輯母片標題樣式</a:t>
             </a:r>
-            <a:endParaRPr lang="zh-TW" altLang="en-US"/>
           </a:p>
         </p:txBody>
       </p:sp>
@@ -2682,38 +2681,37 @@
           <a:p>
             <a:pPr lvl="0"/>
             <a:r>
-              <a:rPr lang="zh-TW" altLang="en-US" smtClean="0"/>
+              <a:rPr lang="zh-TW" altLang="en-US"/>
               <a:t>按一下以編輯母片文字樣式</a:t>
             </a:r>
           </a:p>
           <a:p>
             <a:pPr lvl="1"/>
             <a:r>
-              <a:rPr lang="zh-TW" altLang="en-US" smtClean="0"/>
+              <a:rPr lang="zh-TW" altLang="en-US"/>
               <a:t>第二層</a:t>
             </a:r>
           </a:p>
           <a:p>
             <a:pPr lvl="2"/>
             <a:r>
-              <a:rPr lang="zh-TW" altLang="en-US" smtClean="0"/>
+              <a:rPr lang="zh-TW" altLang="en-US"/>
               <a:t>第三層</a:t>
             </a:r>
           </a:p>
           <a:p>
             <a:pPr lvl="3"/>
             <a:r>
-              <a:rPr lang="zh-TW" altLang="en-US" smtClean="0"/>
+              <a:rPr lang="zh-TW" altLang="en-US"/>
               <a:t>第四層</a:t>
             </a:r>
           </a:p>
           <a:p>
             <a:pPr lvl="4"/>
             <a:r>
-              <a:rPr lang="zh-TW" altLang="en-US" smtClean="0"/>
+              <a:rPr lang="zh-TW" altLang="en-US"/>
               <a:t>第五層</a:t>
             </a:r>
-            <a:endParaRPr lang="zh-TW" altLang="en-US"/>
           </a:p>
         </p:txBody>
       </p:sp>
@@ -2752,7 +2750,7 @@
           <a:p>
             <a:fld id="{DB37BC26-CD71-4144-9EA3-A3A0297D4D7C}" type="datetimeFigureOut">
               <a:rPr lang="zh-TW" altLang="en-US" smtClean="0"/>
-              <a:t>2021/6/3</a:t>
+              <a:t>2024/11/23</a:t>
             </a:fld>
             <a:endParaRPr lang="zh-TW" altLang="en-US"/>
           </a:p>
@@ -3164,24 +3162,7 @@
                 <a:latin typeface="微軟正黑體" pitchFamily="34" charset="-120"/>
                 <a:ea typeface="微軟正黑體" pitchFamily="34" charset="-120"/>
               </a:rPr>
-              <a:t>主</a:t>
-            </a:r>
-            <a:r>
-              <a:rPr lang="zh-TW" altLang="en-US" sz="7200" b="1" i="1" dirty="0">
-                <a:solidFill>
-                  <a:srgbClr val="000066"/>
-                </a:solidFill>
-                <a:effectLst>
-                  <a:outerShdw blurRad="38100" dist="38100" dir="2700000" algn="tl">
-                    <a:srgbClr val="000000">
-                      <a:alpha val="43137"/>
-                    </a:srgbClr>
-                  </a:outerShdw>
-                </a:effectLst>
-                <a:latin typeface="微軟正黑體" pitchFamily="34" charset="-120"/>
-                <a:ea typeface="微軟正黑體" pitchFamily="34" charset="-120"/>
-              </a:rPr>
-              <a:t>是我力量</a:t>
+              <a:t>主是我力量</a:t>
             </a:r>
           </a:p>
         </p:txBody>
@@ -3252,37 +3233,7 @@
                 <a:latin typeface="微軟正黑體" pitchFamily="34" charset="-120"/>
                 <a:ea typeface="微軟正黑體" pitchFamily="34" charset="-120"/>
               </a:rPr>
-              <a:t>主</a:t>
-            </a:r>
-            <a:r>
-              <a:rPr lang="zh-TW" altLang="en-US" sz="6400" b="1" dirty="0">
-                <a:solidFill>
-                  <a:srgbClr val="000066"/>
-                </a:solidFill>
-                <a:latin typeface="微軟正黑體" pitchFamily="34" charset="-120"/>
-                <a:ea typeface="微軟正黑體" pitchFamily="34" charset="-120"/>
-              </a:rPr>
-              <a:t>是我力</a:t>
-            </a:r>
-            <a:r>
-              <a:rPr lang="zh-TW" altLang="en-US" sz="6400" b="1" dirty="0">
-                <a:solidFill>
-                  <a:srgbClr val="000066"/>
-                </a:solidFill>
-                <a:latin typeface="微軟正黑體" pitchFamily="34" charset="-120"/>
-                <a:ea typeface="微軟正黑體" pitchFamily="34" charset="-120"/>
-              </a:rPr>
-              <a:t>量   我</a:t>
-            </a:r>
-            <a:r>
-              <a:rPr lang="zh-TW" altLang="en-US" sz="6400" b="1" dirty="0">
-                <a:solidFill>
-                  <a:srgbClr val="000066"/>
-                </a:solidFill>
-                <a:latin typeface="微軟正黑體" pitchFamily="34" charset="-120"/>
-                <a:ea typeface="微軟正黑體" pitchFamily="34" charset="-120"/>
-              </a:rPr>
-              <a:t>力量　</a:t>
+              <a:t>主是我力量   我力量　</a:t>
             </a:r>
             <a:endParaRPr lang="en-US" altLang="zh-TW" sz="6400" b="1" dirty="0">
               <a:solidFill>
@@ -3315,6 +3266,74 @@
               </a:solidFill>
               <a:latin typeface="微軟正黑體" pitchFamily="34" charset="-120"/>
               <a:ea typeface="微軟正黑體" pitchFamily="34" charset="-120"/>
+            </a:endParaRPr>
+          </a:p>
+        </p:txBody>
+      </p:sp>
+      <p:sp>
+        <p:nvSpPr>
+          <p:cNvPr id="2" name="TextBox 1">
+            <a:extLst>
+              <a:ext uri="{FF2B5EF4-FFF2-40B4-BE49-F238E27FC236}">
+                <a16:creationId xmlns:a16="http://schemas.microsoft.com/office/drawing/2014/main" id="{D5F54008-07D3-2C66-EC57-F4F5056DADD4}"/>
+              </a:ext>
+            </a:extLst>
+          </p:cNvPr>
+          <p:cNvSpPr txBox="1"/>
+          <p:nvPr/>
+        </p:nvSpPr>
+        <p:spPr>
+          <a:xfrm>
+            <a:off x="0" y="5229200"/>
+            <a:ext cx="12192000" cy="584775"/>
+          </a:xfrm>
+          <a:prstGeom prst="rect">
+            <a:avLst/>
+          </a:prstGeom>
+          <a:noFill/>
+        </p:spPr>
+        <p:txBody>
+          <a:bodyPr wrap="square" rtlCol="0">
+            <a:spAutoFit/>
+          </a:bodyPr>
+          <a:lstStyle/>
+          <a:p>
+            <a:pPr algn="ctr"/>
+            <a:r>
+              <a:rPr lang="en-US" sz="3200" b="1" dirty="0">
+                <a:solidFill>
+                  <a:srgbClr val="000066"/>
+                </a:solidFill>
+                <a:latin typeface="Microsoft JhengHei" panose="020B0604030504040204" pitchFamily="34" charset="-120"/>
+                <a:ea typeface="Microsoft JhengHei" panose="020B0604030504040204" pitchFamily="34" charset="-120"/>
+              </a:rPr>
+              <a:t>( </a:t>
+            </a:r>
+            <a:r>
+              <a:rPr lang="zh-CN" altLang="en-US" sz="3200" b="1" dirty="0">
+                <a:solidFill>
+                  <a:srgbClr val="000066"/>
+                </a:solidFill>
+                <a:latin typeface="Microsoft JhengHei" panose="020B0604030504040204" pitchFamily="34" charset="-120"/>
+                <a:ea typeface="Microsoft JhengHei" panose="020B0604030504040204" pitchFamily="34" charset="-120"/>
+              </a:rPr>
+              <a:t>正歌</a:t>
+            </a:r>
+            <a:r>
+              <a:rPr lang="en-US" sz="3200" b="1" dirty="0">
+                <a:solidFill>
+                  <a:srgbClr val="000066"/>
+                </a:solidFill>
+                <a:latin typeface="Microsoft JhengHei" panose="020B0604030504040204" pitchFamily="34" charset="-120"/>
+                <a:ea typeface="Microsoft JhengHei" panose="020B0604030504040204" pitchFamily="34" charset="-120"/>
+              </a:rPr>
+              <a:t> )</a:t>
+            </a:r>
+            <a:endParaRPr lang="vi-VN" sz="3200" b="1" dirty="0">
+              <a:solidFill>
+                <a:srgbClr val="000066"/>
+              </a:solidFill>
+              <a:ea typeface="Microsoft JhengHei" panose="020B0604030504040204" pitchFamily="34" charset="-120"/>
             </a:endParaRPr>
           </a:p>
         </p:txBody>
@@ -3385,27 +3404,7 @@
                 <a:latin typeface="微軟正黑體" pitchFamily="34" charset="-120"/>
                 <a:ea typeface="微軟正黑體" pitchFamily="34" charset="-120"/>
               </a:rPr>
-              <a:t>主是我幫</a:t>
-            </a:r>
-            <a:r>
-              <a:rPr lang="zh-TW" altLang="en-US" sz="6400" b="1" dirty="0">
-                <a:solidFill>
-                  <a:srgbClr val="000066"/>
-                </a:solidFill>
-                <a:latin typeface="微軟正黑體" pitchFamily="34" charset="-120"/>
-                <a:ea typeface="微軟正黑體" pitchFamily="34" charset="-120"/>
-              </a:rPr>
-              <a:t>助   我</a:t>
-            </a:r>
-            <a:r>
-              <a:rPr lang="zh-TW" altLang="en-US" sz="6400" b="1" dirty="0">
-                <a:solidFill>
-                  <a:srgbClr val="000066"/>
-                </a:solidFill>
-                <a:latin typeface="微軟正黑體" pitchFamily="34" charset="-120"/>
-                <a:ea typeface="微軟正黑體" pitchFamily="34" charset="-120"/>
-              </a:rPr>
-              <a:t>幫助</a:t>
+              <a:t>主是我幫助   我幫助</a:t>
             </a:r>
           </a:p>
           <a:p>
@@ -3425,6 +3424,74 @@
               </a:rPr>
               <a:t>主是隨時的幫助</a:t>
             </a:r>
+          </a:p>
+        </p:txBody>
+      </p:sp>
+      <p:sp>
+        <p:nvSpPr>
+          <p:cNvPr id="2" name="TextBox 1">
+            <a:extLst>
+              <a:ext uri="{FF2B5EF4-FFF2-40B4-BE49-F238E27FC236}">
+                <a16:creationId xmlns:a16="http://schemas.microsoft.com/office/drawing/2014/main" id="{7280D097-68E1-DB69-E44B-94E750504CEB}"/>
+              </a:ext>
+            </a:extLst>
+          </p:cNvPr>
+          <p:cNvSpPr txBox="1"/>
+          <p:nvPr/>
+        </p:nvSpPr>
+        <p:spPr>
+          <a:xfrm>
+            <a:off x="0" y="5229200"/>
+            <a:ext cx="12192000" cy="584775"/>
+          </a:xfrm>
+          <a:prstGeom prst="rect">
+            <a:avLst/>
+          </a:prstGeom>
+          <a:noFill/>
+        </p:spPr>
+        <p:txBody>
+          <a:bodyPr wrap="square" rtlCol="0">
+            <a:spAutoFit/>
+          </a:bodyPr>
+          <a:lstStyle/>
+          <a:p>
+            <a:pPr algn="ctr"/>
+            <a:r>
+              <a:rPr lang="en-US" sz="3200" b="1" dirty="0">
+                <a:solidFill>
+                  <a:srgbClr val="000066"/>
+                </a:solidFill>
+                <a:latin typeface="Microsoft JhengHei" panose="020B0604030504040204" pitchFamily="34" charset="-120"/>
+                <a:ea typeface="Microsoft JhengHei" panose="020B0604030504040204" pitchFamily="34" charset="-120"/>
+              </a:rPr>
+              <a:t>( </a:t>
+            </a:r>
+            <a:r>
+              <a:rPr lang="zh-CN" altLang="en-US" sz="3200" b="1" dirty="0">
+                <a:solidFill>
+                  <a:srgbClr val="000066"/>
+                </a:solidFill>
+                <a:latin typeface="Microsoft JhengHei" panose="020B0604030504040204" pitchFamily="34" charset="-120"/>
+                <a:ea typeface="Microsoft JhengHei" panose="020B0604030504040204" pitchFamily="34" charset="-120"/>
+              </a:rPr>
+              <a:t>正歌</a:t>
+            </a:r>
+            <a:r>
+              <a:rPr lang="en-US" sz="3200" b="1" dirty="0">
+                <a:solidFill>
+                  <a:srgbClr val="000066"/>
+                </a:solidFill>
+                <a:latin typeface="Microsoft JhengHei" panose="020B0604030504040204" pitchFamily="34" charset="-120"/>
+                <a:ea typeface="Microsoft JhengHei" panose="020B0604030504040204" pitchFamily="34" charset="-120"/>
+              </a:rPr>
+              <a:t> )</a:t>
+            </a:r>
+            <a:endParaRPr lang="vi-VN" sz="3200" b="1" dirty="0">
+              <a:solidFill>
+                <a:srgbClr val="000066"/>
+              </a:solidFill>
+              <a:ea typeface="Microsoft JhengHei" panose="020B0604030504040204" pitchFamily="34" charset="-120"/>
+            </a:endParaRPr>
           </a:p>
         </p:txBody>
       </p:sp>
@@ -3494,27 +3561,7 @@
                 <a:latin typeface="微軟正黑體" pitchFamily="34" charset="-120"/>
                 <a:ea typeface="微軟正黑體" pitchFamily="34" charset="-120"/>
               </a:rPr>
-              <a:t>主是避難</a:t>
-            </a:r>
-            <a:r>
-              <a:rPr lang="zh-TW" altLang="en-US" sz="6400" b="1" dirty="0">
-                <a:solidFill>
-                  <a:srgbClr val="000066"/>
-                </a:solidFill>
-                <a:latin typeface="微軟正黑體" pitchFamily="34" charset="-120"/>
-                <a:ea typeface="微軟正黑體" pitchFamily="34" charset="-120"/>
-              </a:rPr>
-              <a:t>所   我</a:t>
-            </a:r>
-            <a:r>
-              <a:rPr lang="zh-TW" altLang="en-US" sz="6400" b="1" dirty="0">
-                <a:solidFill>
-                  <a:srgbClr val="000066"/>
-                </a:solidFill>
-                <a:latin typeface="微軟正黑體" pitchFamily="34" charset="-120"/>
-                <a:ea typeface="微軟正黑體" pitchFamily="34" charset="-120"/>
-              </a:rPr>
-              <a:t>避難所</a:t>
+              <a:t>主是避難所   我避難所</a:t>
             </a:r>
             <a:endParaRPr lang="en-US" altLang="zh-TW" sz="6400" b="1" dirty="0">
               <a:solidFill>
@@ -3547,6 +3594,74 @@
               </a:solidFill>
               <a:latin typeface="微軟正黑體" pitchFamily="34" charset="-120"/>
               <a:ea typeface="微軟正黑體" pitchFamily="34" charset="-120"/>
+            </a:endParaRPr>
+          </a:p>
+        </p:txBody>
+      </p:sp>
+      <p:sp>
+        <p:nvSpPr>
+          <p:cNvPr id="2" name="TextBox 1">
+            <a:extLst>
+              <a:ext uri="{FF2B5EF4-FFF2-40B4-BE49-F238E27FC236}">
+                <a16:creationId xmlns:a16="http://schemas.microsoft.com/office/drawing/2014/main" id="{FCE869E3-CF22-0C34-DB08-264AD3392590}"/>
+              </a:ext>
+            </a:extLst>
+          </p:cNvPr>
+          <p:cNvSpPr txBox="1"/>
+          <p:nvPr/>
+        </p:nvSpPr>
+        <p:spPr>
+          <a:xfrm>
+            <a:off x="0" y="5229200"/>
+            <a:ext cx="12192000" cy="584775"/>
+          </a:xfrm>
+          <a:prstGeom prst="rect">
+            <a:avLst/>
+          </a:prstGeom>
+          <a:noFill/>
+        </p:spPr>
+        <p:txBody>
+          <a:bodyPr wrap="square" rtlCol="0">
+            <a:spAutoFit/>
+          </a:bodyPr>
+          <a:lstStyle/>
+          <a:p>
+            <a:pPr algn="ctr"/>
+            <a:r>
+              <a:rPr lang="en-US" sz="3200" b="1" dirty="0">
+                <a:solidFill>
+                  <a:srgbClr val="000066"/>
+                </a:solidFill>
+                <a:latin typeface="Microsoft JhengHei" panose="020B0604030504040204" pitchFamily="34" charset="-120"/>
+                <a:ea typeface="Microsoft JhengHei" panose="020B0604030504040204" pitchFamily="34" charset="-120"/>
+              </a:rPr>
+              <a:t>( </a:t>
+            </a:r>
+            <a:r>
+              <a:rPr lang="zh-CN" altLang="en-US" sz="3200" b="1" dirty="0">
+                <a:solidFill>
+                  <a:srgbClr val="000066"/>
+                </a:solidFill>
+                <a:latin typeface="Microsoft JhengHei" panose="020B0604030504040204" pitchFamily="34" charset="-120"/>
+                <a:ea typeface="Microsoft JhengHei" panose="020B0604030504040204" pitchFamily="34" charset="-120"/>
+              </a:rPr>
+              <a:t>正歌</a:t>
+            </a:r>
+            <a:r>
+              <a:rPr lang="en-US" sz="3200" b="1" dirty="0">
+                <a:solidFill>
+                  <a:srgbClr val="000066"/>
+                </a:solidFill>
+                <a:latin typeface="Microsoft JhengHei" panose="020B0604030504040204" pitchFamily="34" charset="-120"/>
+                <a:ea typeface="Microsoft JhengHei" panose="020B0604030504040204" pitchFamily="34" charset="-120"/>
+              </a:rPr>
+              <a:t> )</a:t>
+            </a:r>
+            <a:endParaRPr lang="vi-VN" sz="3200" b="1" dirty="0">
+              <a:solidFill>
+                <a:srgbClr val="000066"/>
+              </a:solidFill>
+              <a:ea typeface="Microsoft JhengHei" panose="020B0604030504040204" pitchFamily="34" charset="-120"/>
             </a:endParaRPr>
           </a:p>
         </p:txBody>
@@ -3617,27 +3732,7 @@
                 <a:latin typeface="微軟正黑體" pitchFamily="34" charset="-120"/>
                 <a:ea typeface="微軟正黑體" pitchFamily="34" charset="-120"/>
               </a:rPr>
-              <a:t>主是我力</a:t>
-            </a:r>
-            <a:r>
-              <a:rPr lang="zh-TW" altLang="en-US" sz="6400" b="1" dirty="0">
-                <a:solidFill>
-                  <a:srgbClr val="000066"/>
-                </a:solidFill>
-                <a:latin typeface="微軟正黑體" pitchFamily="34" charset="-120"/>
-                <a:ea typeface="微軟正黑體" pitchFamily="34" charset="-120"/>
-              </a:rPr>
-              <a:t>量   我</a:t>
-            </a:r>
-            <a:r>
-              <a:rPr lang="zh-TW" altLang="en-US" sz="6400" b="1" dirty="0">
-                <a:solidFill>
-                  <a:srgbClr val="000066"/>
-                </a:solidFill>
-                <a:latin typeface="微軟正黑體" pitchFamily="34" charset="-120"/>
-                <a:ea typeface="微軟正黑體" pitchFamily="34" charset="-120"/>
-              </a:rPr>
-              <a:t>幫助</a:t>
+              <a:t>主是我力量   我幫助</a:t>
             </a:r>
             <a:endParaRPr lang="en-US" altLang="zh-TW" sz="6400" b="1" dirty="0">
               <a:solidFill>
@@ -3664,6 +3759,74 @@
               </a:rPr>
               <a:t>唯主是避難所</a:t>
             </a:r>
+          </a:p>
+        </p:txBody>
+      </p:sp>
+      <p:sp>
+        <p:nvSpPr>
+          <p:cNvPr id="2" name="TextBox 1">
+            <a:extLst>
+              <a:ext uri="{FF2B5EF4-FFF2-40B4-BE49-F238E27FC236}">
+                <a16:creationId xmlns:a16="http://schemas.microsoft.com/office/drawing/2014/main" id="{F30EBE08-413E-BD17-8449-848974823875}"/>
+              </a:ext>
+            </a:extLst>
+          </p:cNvPr>
+          <p:cNvSpPr txBox="1"/>
+          <p:nvPr/>
+        </p:nvSpPr>
+        <p:spPr>
+          <a:xfrm>
+            <a:off x="0" y="5229200"/>
+            <a:ext cx="12192000" cy="584775"/>
+          </a:xfrm>
+          <a:prstGeom prst="rect">
+            <a:avLst/>
+          </a:prstGeom>
+          <a:noFill/>
+        </p:spPr>
+        <p:txBody>
+          <a:bodyPr wrap="square" rtlCol="0">
+            <a:spAutoFit/>
+          </a:bodyPr>
+          <a:lstStyle/>
+          <a:p>
+            <a:pPr algn="ctr"/>
+            <a:r>
+              <a:rPr lang="en-US" sz="3200" b="1" dirty="0">
+                <a:solidFill>
+                  <a:srgbClr val="000066"/>
+                </a:solidFill>
+                <a:latin typeface="Microsoft JhengHei" panose="020B0604030504040204" pitchFamily="34" charset="-120"/>
+                <a:ea typeface="Microsoft JhengHei" panose="020B0604030504040204" pitchFamily="34" charset="-120"/>
+              </a:rPr>
+              <a:t>( </a:t>
+            </a:r>
+            <a:r>
+              <a:rPr lang="zh-CN" altLang="en-US" sz="3200" b="1" dirty="0">
+                <a:solidFill>
+                  <a:srgbClr val="000066"/>
+                </a:solidFill>
+                <a:latin typeface="Microsoft JhengHei" panose="020B0604030504040204" pitchFamily="34" charset="-120"/>
+                <a:ea typeface="Microsoft JhengHei" panose="020B0604030504040204" pitchFamily="34" charset="-120"/>
+              </a:rPr>
+              <a:t>正歌</a:t>
+            </a:r>
+            <a:r>
+              <a:rPr lang="en-US" sz="3200" b="1" dirty="0">
+                <a:solidFill>
+                  <a:srgbClr val="000066"/>
+                </a:solidFill>
+                <a:latin typeface="Microsoft JhengHei" panose="020B0604030504040204" pitchFamily="34" charset="-120"/>
+                <a:ea typeface="Microsoft JhengHei" panose="020B0604030504040204" pitchFamily="34" charset="-120"/>
+              </a:rPr>
+              <a:t> )</a:t>
+            </a:r>
+            <a:endParaRPr lang="vi-VN" sz="3200" b="1" dirty="0">
+              <a:solidFill>
+                <a:srgbClr val="000066"/>
+              </a:solidFill>
+              <a:ea typeface="Microsoft JhengHei" panose="020B0604030504040204" pitchFamily="34" charset="-120"/>
+            </a:endParaRPr>
           </a:p>
         </p:txBody>
       </p:sp>
@@ -3733,17 +3896,7 @@
                 <a:latin typeface="微軟正黑體" pitchFamily="34" charset="-120"/>
                 <a:ea typeface="微軟正黑體" pitchFamily="34" charset="-120"/>
               </a:rPr>
-              <a:t>大地雖會改</a:t>
-            </a:r>
-            <a:r>
-              <a:rPr lang="zh-TW" altLang="en-US" sz="6400" b="1" dirty="0">
-                <a:solidFill>
-                  <a:srgbClr val="000066"/>
-                </a:solidFill>
-                <a:latin typeface="微軟正黑體" pitchFamily="34" charset="-120"/>
-                <a:ea typeface="微軟正黑體" pitchFamily="34" charset="-120"/>
-              </a:rPr>
-              <a:t>變</a:t>
+              <a:t>大地雖會改變</a:t>
             </a:r>
             <a:endParaRPr lang="en-US" altLang="zh-TW" sz="6400" b="1" dirty="0">
               <a:solidFill>
@@ -3768,17 +3921,7 @@
                 <a:latin typeface="微軟正黑體" pitchFamily="34" charset="-120"/>
                 <a:ea typeface="微軟正黑體" pitchFamily="34" charset="-120"/>
               </a:rPr>
-              <a:t>高</a:t>
-            </a:r>
-            <a:r>
-              <a:rPr lang="zh-TW" altLang="en-US" sz="6400" b="1" dirty="0">
-                <a:solidFill>
-                  <a:srgbClr val="000066"/>
-                </a:solidFill>
-                <a:latin typeface="微軟正黑體" pitchFamily="34" charset="-120"/>
-                <a:ea typeface="微軟正黑體" pitchFamily="34" charset="-120"/>
-              </a:rPr>
-              <a:t>山雖會動搖</a:t>
+              <a:t>高山雖會動搖</a:t>
             </a:r>
             <a:endParaRPr lang="en-US" altLang="zh-TW" sz="6400" b="1" dirty="0">
               <a:solidFill>
@@ -3786,6 +3929,74 @@
               </a:solidFill>
               <a:latin typeface="微軟正黑體" pitchFamily="34" charset="-120"/>
               <a:ea typeface="微軟正黑體" pitchFamily="34" charset="-120"/>
+            </a:endParaRPr>
+          </a:p>
+        </p:txBody>
+      </p:sp>
+      <p:sp>
+        <p:nvSpPr>
+          <p:cNvPr id="2" name="TextBox 1">
+            <a:extLst>
+              <a:ext uri="{FF2B5EF4-FFF2-40B4-BE49-F238E27FC236}">
+                <a16:creationId xmlns:a16="http://schemas.microsoft.com/office/drawing/2014/main" id="{A1CC520B-3401-B658-5BA6-BA64C6543FF8}"/>
+              </a:ext>
+            </a:extLst>
+          </p:cNvPr>
+          <p:cNvSpPr txBox="1"/>
+          <p:nvPr/>
+        </p:nvSpPr>
+        <p:spPr>
+          <a:xfrm>
+            <a:off x="0" y="5229200"/>
+            <a:ext cx="12192000" cy="584775"/>
+          </a:xfrm>
+          <a:prstGeom prst="rect">
+            <a:avLst/>
+          </a:prstGeom>
+          <a:noFill/>
+        </p:spPr>
+        <p:txBody>
+          <a:bodyPr wrap="square" rtlCol="0">
+            <a:spAutoFit/>
+          </a:bodyPr>
+          <a:lstStyle/>
+          <a:p>
+            <a:pPr algn="ctr"/>
+            <a:r>
+              <a:rPr lang="en-US" sz="3200" b="1" dirty="0">
+                <a:solidFill>
+                  <a:srgbClr val="000066"/>
+                </a:solidFill>
+                <a:latin typeface="Microsoft JhengHei" panose="020B0604030504040204" pitchFamily="34" charset="-120"/>
+                <a:ea typeface="Microsoft JhengHei" panose="020B0604030504040204" pitchFamily="34" charset="-120"/>
+              </a:rPr>
+              <a:t>( </a:t>
+            </a:r>
+            <a:r>
+              <a:rPr lang="zh-CN" altLang="en-US" sz="3200" b="1" dirty="0">
+                <a:solidFill>
+                  <a:srgbClr val="000066"/>
+                </a:solidFill>
+                <a:latin typeface="Microsoft JhengHei" panose="020B0604030504040204" pitchFamily="34" charset="-120"/>
+                <a:ea typeface="Microsoft JhengHei" panose="020B0604030504040204" pitchFamily="34" charset="-120"/>
+              </a:rPr>
+              <a:t>副歌</a:t>
+            </a:r>
+            <a:r>
+              <a:rPr lang="en-US" sz="3200" b="1" dirty="0">
+                <a:solidFill>
+                  <a:srgbClr val="000066"/>
+                </a:solidFill>
+                <a:latin typeface="Microsoft JhengHei" panose="020B0604030504040204" pitchFamily="34" charset="-120"/>
+                <a:ea typeface="Microsoft JhengHei" panose="020B0604030504040204" pitchFamily="34" charset="-120"/>
+              </a:rPr>
+              <a:t> )</a:t>
+            </a:r>
+            <a:endParaRPr lang="vi-VN" sz="3200" b="1" dirty="0">
+              <a:solidFill>
+                <a:srgbClr val="000066"/>
+              </a:solidFill>
+              <a:ea typeface="Microsoft JhengHei" panose="020B0604030504040204" pitchFamily="34" charset="-120"/>
             </a:endParaRPr>
           </a:p>
         </p:txBody>
@@ -3856,37 +4067,7 @@
                 <a:latin typeface="微軟正黑體" pitchFamily="34" charset="-120"/>
                 <a:ea typeface="微軟正黑體" pitchFamily="34" charset="-120"/>
               </a:rPr>
-              <a:t>大海翻</a:t>
-            </a:r>
-            <a:r>
-              <a:rPr lang="zh-TW" altLang="en-US" sz="6400" b="1" dirty="0">
-                <a:solidFill>
-                  <a:srgbClr val="000066"/>
-                </a:solidFill>
-                <a:latin typeface="微軟正黑體" pitchFamily="34" charset="-120"/>
-                <a:ea typeface="微軟正黑體" pitchFamily="34" charset="-120"/>
-              </a:rPr>
-              <a:t>騰   大</a:t>
-            </a:r>
-            <a:r>
-              <a:rPr lang="zh-TW" altLang="en-US" sz="6400" b="1" dirty="0">
-                <a:solidFill>
-                  <a:srgbClr val="000066"/>
-                </a:solidFill>
-                <a:latin typeface="微軟正黑體" pitchFamily="34" charset="-120"/>
-                <a:ea typeface="微軟正黑體" pitchFamily="34" charset="-120"/>
-              </a:rPr>
-              <a:t>浪戰</a:t>
-            </a:r>
-            <a:r>
-              <a:rPr lang="zh-TW" altLang="en-US" sz="6400" b="1" dirty="0">
-                <a:solidFill>
-                  <a:srgbClr val="000066"/>
-                </a:solidFill>
-                <a:latin typeface="微軟正黑體" pitchFamily="34" charset="-120"/>
-                <a:ea typeface="微軟正黑體" pitchFamily="34" charset="-120"/>
-              </a:rPr>
-              <a:t>抖</a:t>
+              <a:t>大海翻騰   大浪戰抖</a:t>
             </a:r>
             <a:endParaRPr lang="en-US" altLang="zh-TW" sz="6400" b="1" dirty="0">
               <a:solidFill>
@@ -3919,6 +4100,74 @@
               </a:solidFill>
               <a:latin typeface="微軟正黑體" pitchFamily="34" charset="-120"/>
               <a:ea typeface="微軟正黑體" pitchFamily="34" charset="-120"/>
+            </a:endParaRPr>
+          </a:p>
+        </p:txBody>
+      </p:sp>
+      <p:sp>
+        <p:nvSpPr>
+          <p:cNvPr id="2" name="TextBox 1">
+            <a:extLst>
+              <a:ext uri="{FF2B5EF4-FFF2-40B4-BE49-F238E27FC236}">
+                <a16:creationId xmlns:a16="http://schemas.microsoft.com/office/drawing/2014/main" id="{04307ADA-3677-021B-E6D2-22C23C684769}"/>
+              </a:ext>
+            </a:extLst>
+          </p:cNvPr>
+          <p:cNvSpPr txBox="1"/>
+          <p:nvPr/>
+        </p:nvSpPr>
+        <p:spPr>
+          <a:xfrm>
+            <a:off x="0" y="5229200"/>
+            <a:ext cx="12192000" cy="584775"/>
+          </a:xfrm>
+          <a:prstGeom prst="rect">
+            <a:avLst/>
+          </a:prstGeom>
+          <a:noFill/>
+        </p:spPr>
+        <p:txBody>
+          <a:bodyPr wrap="square" rtlCol="0">
+            <a:spAutoFit/>
+          </a:bodyPr>
+          <a:lstStyle/>
+          <a:p>
+            <a:pPr algn="ctr"/>
+            <a:r>
+              <a:rPr lang="en-US" sz="3200" b="1" dirty="0">
+                <a:solidFill>
+                  <a:srgbClr val="000066"/>
+                </a:solidFill>
+                <a:latin typeface="Microsoft JhengHei" panose="020B0604030504040204" pitchFamily="34" charset="-120"/>
+                <a:ea typeface="Microsoft JhengHei" panose="020B0604030504040204" pitchFamily="34" charset="-120"/>
+              </a:rPr>
+              <a:t>( </a:t>
+            </a:r>
+            <a:r>
+              <a:rPr lang="zh-CN" altLang="en-US" sz="3200" b="1" dirty="0">
+                <a:solidFill>
+                  <a:srgbClr val="000066"/>
+                </a:solidFill>
+                <a:latin typeface="Microsoft JhengHei" panose="020B0604030504040204" pitchFamily="34" charset="-120"/>
+                <a:ea typeface="Microsoft JhengHei" panose="020B0604030504040204" pitchFamily="34" charset="-120"/>
+              </a:rPr>
+              <a:t>副歌</a:t>
+            </a:r>
+            <a:r>
+              <a:rPr lang="en-US" sz="3200" b="1" dirty="0">
+                <a:solidFill>
+                  <a:srgbClr val="000066"/>
+                </a:solidFill>
+                <a:latin typeface="Microsoft JhengHei" panose="020B0604030504040204" pitchFamily="34" charset="-120"/>
+                <a:ea typeface="Microsoft JhengHei" panose="020B0604030504040204" pitchFamily="34" charset="-120"/>
+              </a:rPr>
+              <a:t> )</a:t>
+            </a:r>
+            <a:endParaRPr lang="vi-VN" sz="3200" b="1" dirty="0">
+              <a:solidFill>
+                <a:srgbClr val="000066"/>
+              </a:solidFill>
+              <a:ea typeface="Microsoft JhengHei" panose="020B0604030504040204" pitchFamily="34" charset="-120"/>
             </a:endParaRPr>
           </a:p>
         </p:txBody>
@@ -4009,8 +4258,26 @@
                 <a:latin typeface="微軟正黑體" pitchFamily="34" charset="-120"/>
                 <a:ea typeface="微軟正黑體" pitchFamily="34" charset="-120"/>
               </a:rPr>
-              <a:t>　</a:t>
-            </a:r>
+              <a:t>　喂哦</a:t>
+            </a:r>
+            <a:r>
+              <a:rPr lang="en-US" altLang="zh-TW" sz="6400" b="1" dirty="0">
+                <a:solidFill>
+                  <a:srgbClr val="000066"/>
+                </a:solidFill>
+                <a:latin typeface="微軟正黑體" pitchFamily="34" charset="-120"/>
+                <a:ea typeface="微軟正黑體" pitchFamily="34" charset="-120"/>
+              </a:rPr>
+              <a:t>~</a:t>
+            </a:r>
+          </a:p>
+          <a:p>
+            <a:pPr lvl="0" algn="ctr" fontAlgn="base">
+              <a:spcAft>
+                <a:spcPct val="0"/>
+              </a:spcAft>
+              <a:buNone/>
+            </a:pPr>
             <a:r>
               <a:rPr lang="zh-TW" altLang="en-US" sz="6400" b="1" dirty="0">
                 <a:solidFill>
@@ -4039,9 +4306,19 @@
                 <a:latin typeface="微軟正黑體" pitchFamily="34" charset="-120"/>
                 <a:ea typeface="微軟正黑體" pitchFamily="34" charset="-120"/>
               </a:rPr>
-              <a:t>　</a:t>
-            </a:r>
-            <a:endParaRPr lang="en-US" altLang="zh-TW" sz="6400" b="1" dirty="0">
+              <a:t>   喂哦</a:t>
+            </a:r>
+            <a:r>
+              <a:rPr lang="en-US" altLang="zh-TW" sz="6400" b="1" dirty="0">
+                <a:solidFill>
+                  <a:srgbClr val="000066"/>
+                </a:solidFill>
+                <a:latin typeface="微軟正黑體" pitchFamily="34" charset="-120"/>
+                <a:ea typeface="微軟正黑體" pitchFamily="34" charset="-120"/>
+              </a:rPr>
+              <a:t>~</a:t>
+            </a:r>
+            <a:endParaRPr lang="zh-TW" altLang="en-US" sz="6400" b="1" dirty="0">
               <a:solidFill>
                 <a:srgbClr val="000066"/>
               </a:solidFill>
@@ -4049,69 +4326,72 @@
               <a:ea typeface="微軟正黑體" pitchFamily="34" charset="-120"/>
             </a:endParaRPr>
           </a:p>
-          <a:p>
-            <a:pPr lvl="0" algn="ctr" fontAlgn="base">
-              <a:spcAft>
-                <a:spcPct val="0"/>
-              </a:spcAft>
-              <a:buNone/>
-            </a:pPr>
-            <a:r>
-              <a:rPr lang="zh-TW" altLang="en-US" sz="6400" b="1" dirty="0">
+        </p:txBody>
+      </p:sp>
+      <p:sp>
+        <p:nvSpPr>
+          <p:cNvPr id="2" name="TextBox 1">
+            <a:extLst>
+              <a:ext uri="{FF2B5EF4-FFF2-40B4-BE49-F238E27FC236}">
+                <a16:creationId xmlns:a16="http://schemas.microsoft.com/office/drawing/2014/main" id="{BEB3F1B6-3CCA-8EEB-207C-EFD4A58A0E79}"/>
+              </a:ext>
+            </a:extLst>
+          </p:cNvPr>
+          <p:cNvSpPr txBox="1"/>
+          <p:nvPr/>
+        </p:nvSpPr>
+        <p:spPr>
+          <a:xfrm>
+            <a:off x="0" y="5229200"/>
+            <a:ext cx="12192000" cy="584775"/>
+          </a:xfrm>
+          <a:prstGeom prst="rect">
+            <a:avLst/>
+          </a:prstGeom>
+          <a:noFill/>
+        </p:spPr>
+        <p:txBody>
+          <a:bodyPr wrap="square" rtlCol="0">
+            <a:spAutoFit/>
+          </a:bodyPr>
+          <a:lstStyle/>
+          <a:p>
+            <a:pPr algn="ctr"/>
+            <a:r>
+              <a:rPr lang="en-US" sz="3200" b="1" dirty="0">
                 <a:solidFill>
                   <a:srgbClr val="000066"/>
                 </a:solidFill>
-                <a:latin typeface="微軟正黑體" pitchFamily="34" charset="-120"/>
-                <a:ea typeface="微軟正黑體" pitchFamily="34" charset="-120"/>
+                <a:latin typeface="Microsoft JhengHei" panose="020B0604030504040204" pitchFamily="34" charset="-120"/>
+                <a:ea typeface="Microsoft JhengHei" panose="020B0604030504040204" pitchFamily="34" charset="-120"/>
               </a:rPr>
-              <a:t>喂哦</a:t>
-            </a:r>
-            <a:r>
-              <a:rPr lang="en-US" altLang="zh-TW" sz="6400" b="1" dirty="0">
+              <a:t>( </a:t>
+            </a:r>
+            <a:r>
+              <a:rPr lang="zh-CN" altLang="en-US" sz="3200" b="1" dirty="0">
                 <a:solidFill>
                   <a:srgbClr val="000066"/>
                 </a:solidFill>
-                <a:latin typeface="微軟正黑體" pitchFamily="34" charset="-120"/>
-                <a:ea typeface="微軟正黑體" pitchFamily="34" charset="-120"/>
+                <a:latin typeface="Microsoft JhengHei" panose="020B0604030504040204" pitchFamily="34" charset="-120"/>
+                <a:ea typeface="Microsoft JhengHei" panose="020B0604030504040204" pitchFamily="34" charset="-120"/>
               </a:rPr>
-              <a:t>~ </a:t>
-            </a:r>
-            <a:r>
-              <a:rPr lang="zh-TW" altLang="en-US" sz="6400" b="1" dirty="0">
+              <a:t>副歌</a:t>
+            </a:r>
+            <a:r>
+              <a:rPr lang="en-US" sz="3200" b="1" dirty="0">
                 <a:solidFill>
                   <a:srgbClr val="000066"/>
                 </a:solidFill>
-                <a:latin typeface="微軟正黑體" pitchFamily="34" charset="-120"/>
-                <a:ea typeface="微軟正黑體" pitchFamily="34" charset="-120"/>
+                <a:latin typeface="Microsoft JhengHei" panose="020B0604030504040204" pitchFamily="34" charset="-120"/>
+                <a:ea typeface="Microsoft JhengHei" panose="020B0604030504040204" pitchFamily="34" charset="-120"/>
               </a:rPr>
-              <a:t>　</a:t>
-            </a:r>
-            <a:r>
-              <a:rPr lang="zh-TW" altLang="en-US" sz="6400" b="1" dirty="0">
-                <a:solidFill>
-                  <a:srgbClr val="000066"/>
-                </a:solidFill>
-                <a:latin typeface="微軟正黑體" pitchFamily="34" charset="-120"/>
-                <a:ea typeface="微軟正黑體" pitchFamily="34" charset="-120"/>
-              </a:rPr>
-              <a:t>喂哦</a:t>
-            </a:r>
-            <a:r>
-              <a:rPr lang="en-US" altLang="zh-TW" sz="6400" b="1" dirty="0">
-                <a:solidFill>
-                  <a:srgbClr val="000066"/>
-                </a:solidFill>
-                <a:latin typeface="微軟正黑體" pitchFamily="34" charset="-120"/>
-                <a:ea typeface="微軟正黑體" pitchFamily="34" charset="-120"/>
-              </a:rPr>
-              <a:t>~</a:t>
-            </a:r>
-            <a:endParaRPr lang="zh-TW" altLang="en-US" sz="6400" b="1" dirty="0">
+              <a:t> )</a:t>
+            </a:r>
+            <a:endParaRPr lang="vi-VN" sz="3200" b="1" dirty="0">
               <a:solidFill>
                 <a:srgbClr val="000066"/>
               </a:solidFill>
-              <a:latin typeface="微軟正黑體" pitchFamily="34" charset="-120"/>
-              <a:ea typeface="微軟正黑體" pitchFamily="34" charset="-120"/>
+              <a:ea typeface="Microsoft JhengHei" panose="020B0604030504040204" pitchFamily="34" charset="-120"/>
             </a:endParaRPr>
           </a:p>
         </p:txBody>
